--- a/dist/초3/사회·역사/과거와현재/초3_사회·역사_과거와현재_01_생활도구의변화.pptx
+++ b/dist/초3/사회·역사/과거와현재/초3_사회·역사_과거와현재_01_생활도구의변화.pptx
@@ -120,13 +120,13 @@
   <p:extLst>
     <p:ext uri="{521415D9-36F7-43E2-AB2F-B90AF26B5E84}">
       <p14:sectionLst xmlns:p14="http://schemas.microsoft.com/office/powerpoint/2010/main">
-        <p14:section name="도입" id="{87cfe062-feaf-571c-76bc-0f72b5f3eebd}">
+        <p14:section name="도입" id="{d28b65ae-6ee4-b214-be3d-fc70546229c5}">
           <p14:sldIdLst>
             <p14:sldId id="256"/>
             <p14:sldId id="257"/>
           </p14:sldIdLst>
         </p14:section>
-        <p14:section name="개념" id="{992860fd-ed10-6a6b-9c65-17acb4792c3c}">
+        <p14:section name="개념" id="{23469152-75f8-6b76-d422-e41117a1b906}">
           <p14:sldIdLst>
             <p14:sldId id="258"/>
             <p14:sldId id="259"/>
@@ -134,32 +134,32 @@
             <p14:sldId id="262"/>
           </p14:sldIdLst>
         </p14:section>
-        <p14:section name="연습" id="{de70d7c0-8086-f606-ab90-b482682f28b5}">
+        <p14:section name="연습" id="{34337122-74ab-cf0a-167d-f0f7b1dc7698}">
           <p14:sldIdLst>
             <p14:sldId id="261"/>
             <p14:sldId id="263"/>
             <p14:sldId id="264"/>
           </p14:sldIdLst>
         </p14:section>
-        <p14:section name="개념" id="{3c0b197d-0712-b6bd-fc57-d8bbe04a5dd6}">
+        <p14:section name="개념" id="{45b59865-f358-58d2-6b55-4d50ae032c5f}">
           <p14:sldIdLst/>
         </p14:section>
-        <p14:section name="연습" id="{fcc87bf0-aa7a-23e8-155c-e21191bdbe87}">
+        <p14:section name="연습" id="{2f220f55-6f0e-c7bf-7e4c-d133b56fce4b}">
           <p14:sldIdLst/>
         </p14:section>
-        <p14:section name="확인" id="{3e4627b0-9b8e-a0cb-7415-96a3e1975aa8}">
+        <p14:section name="확인" id="{b1f44538-5fd2-1cee-bd47-a00c72eb1e77}">
           <p14:sldIdLst>
             <p14:sldId id="265"/>
             <p14:sldId id="266"/>
             <p14:sldId id="267"/>
           </p14:sldIdLst>
         </p14:section>
-        <p14:section name="정리" id="{5163f331-57d6-5de2-d1ff-54d4c0460647}">
+        <p14:section name="정리" id="{a066e4e5-9f00-faa7-cc4f-d8e7d4236d31}">
           <p14:sldIdLst>
             <p14:sldId id="268"/>
           </p14:sldIdLst>
         </p14:section>
-        <p14:section name="보충" id="{64f8ac55-fba3-37a8-d0a2-d5a3bd5201a0}">
+        <p14:section name="보충" id="{d4c498d1-90b2-9bbb-440d-51f94a10f151}">
           <p14:sldIdLst>
             <p14:sldId id="269"/>
           </p14:sldIdLst>

--- a/dist/초3/사회·역사/과거와현재/초3_사회·역사_과거와현재_01_생활도구의변화.pptx
+++ b/dist/초3/사회·역사/과거와현재/초3_사회·역사_과거와현재_01_생활도구의변화.pptx
@@ -120,13 +120,13 @@
   <p:extLst>
     <p:ext uri="{521415D9-36F7-43E2-AB2F-B90AF26B5E84}">
       <p14:sectionLst xmlns:p14="http://schemas.microsoft.com/office/powerpoint/2010/main">
-        <p14:section name="도입" id="{d28b65ae-6ee4-b214-be3d-fc70546229c5}">
+        <p14:section name="도입" id="{46cb25e6-f0fb-5c91-96c6-6d78ec86627d}">
           <p14:sldIdLst>
             <p14:sldId id="256"/>
             <p14:sldId id="257"/>
           </p14:sldIdLst>
         </p14:section>
-        <p14:section name="개념" id="{23469152-75f8-6b76-d422-e41117a1b906}">
+        <p14:section name="개념" id="{5dea1118-8d5b-6a69-2d12-9b6772a3598a}">
           <p14:sldIdLst>
             <p14:sldId id="258"/>
             <p14:sldId id="259"/>
@@ -134,32 +134,32 @@
             <p14:sldId id="262"/>
           </p14:sldIdLst>
         </p14:section>
-        <p14:section name="연습" id="{34337122-74ab-cf0a-167d-f0f7b1dc7698}">
+        <p14:section name="연습" id="{c948c5fe-c29b-953b-b3a2-65b895e8d0d9}">
           <p14:sldIdLst>
             <p14:sldId id="261"/>
             <p14:sldId id="263"/>
             <p14:sldId id="264"/>
           </p14:sldIdLst>
         </p14:section>
-        <p14:section name="개념" id="{45b59865-f358-58d2-6b55-4d50ae032c5f}">
+        <p14:section name="개념" id="{7e6d54ab-3bd1-90e1-ec02-ca38ab67aaeb}">
           <p14:sldIdLst/>
         </p14:section>
-        <p14:section name="연습" id="{2f220f55-6f0e-c7bf-7e4c-d133b56fce4b}">
+        <p14:section name="연습" id="{c35d10a9-3eb1-2eed-a65a-0f2c0a532a1d}">
           <p14:sldIdLst/>
         </p14:section>
-        <p14:section name="확인" id="{b1f44538-5fd2-1cee-bd47-a00c72eb1e77}">
+        <p14:section name="확인" id="{d4772ce1-54b4-b21c-f049-ff3c7b1812ce}">
           <p14:sldIdLst>
             <p14:sldId id="265"/>
             <p14:sldId id="266"/>
             <p14:sldId id="267"/>
           </p14:sldIdLst>
         </p14:section>
-        <p14:section name="정리" id="{a066e4e5-9f00-faa7-cc4f-d8e7d4236d31}">
+        <p14:section name="정리" id="{87750d42-3f07-908b-e891-e460fd64365f}">
           <p14:sldIdLst>
             <p14:sldId id="268"/>
           </p14:sldIdLst>
         </p14:section>
-        <p14:section name="보충" id="{d4c498d1-90b2-9bbb-440d-51f94a10f151}">
+        <p14:section name="보충" id="{37655d27-94eb-65a2-b706-3e41908fe645}">
           <p14:sldIdLst>
             <p14:sldId id="269"/>
           </p14:sldIdLst>
@@ -1084,7 +1084,7 @@
 막히면
 - 아기 때 사진이 있으면 함께 보며 그때 쓰던 물건을 찾아봅니다(선택).
 주의
-- 이 차시는 계획상 앞 차시가 없습니다. 보충 뒤에도 어려우면 집 안의 도구 다섯 가지를 골라 ‘무슨 일을 하는 도구인지’ 말하는 놀이를 며칠 해 본 뒤 S02부터 다시 시작합니다.
+- 보충 뒤에도 어려우면 집 안의 도구 다섯 가지를 골라 ‘무슨 일을 하는 도구인지’ 말하는 놀이를 며칠 해 본 뒤 S02부터 다시 시작합니다.
 - 보충이 오래 걸리면 오늘은 여기까지 하고 다음 날 S02부터 다시 시작합니다.</a:t>
             </a:r>
             <a:endParaRPr lang="en-US" dirty="0"/>
@@ -1184,7 +1184,7 @@
 - ③ 없었어요. 할머니·할아버지가 어렸을 때는 휴대 전화가 없었습니다.
 막히면
 - 부엌이나 욕실에 가서 도구를 직접 보며 “이건 무슨 일을 할 때 써?”라고 묻습니다.
-- 도구가 하는 일을 거의 말하지 못하거나 옛날과 오늘날을 구별하지 못하면 S14(보충)를 먼저 합니다. 이 차시는 계획상 앞 차시가 없습니다(2학년 ‘옛날과 오늘’과 가까운 내용입니다).
+- 도구가 하는 일을 거의 말하지 못하거나 옛날과 오늘날을 구별하지 못하면 S14(보충)를 먼저 합니다. 앞 차시는 2학년 ‘옛날과 오늘’입니다.
 주의
 - ③은 정확한 연도를 묻는 것이 아닙니다. ‘옛날에는 지금 쓰는 물건이 없었을 수도 있다’는 생각을 열어 주는 질문입니다.</a:t>
             </a:r>
